--- a/2024-04-15/influxdb grafana.pptx
+++ b/2024-04-15/influxdb grafana.pptx
@@ -294,7 +294,7 @@
               <a:pPr>
                 <a:defRPr/>
               </a:pPr>
-              <a:t>16.11.2022</a:t>
+              <a:t>22.05.2025</a:t>
             </a:fld>
             <a:endParaRPr lang="de-AT"/>
           </a:p>
@@ -509,7 +509,7 @@
               <a:pPr>
                 <a:defRPr/>
               </a:pPr>
-              <a:t>16.11.2022</a:t>
+              <a:t>22.05.2025</a:t>
             </a:fld>
             <a:endParaRPr lang="de-AT"/>
           </a:p>
@@ -1376,7 +1376,7 @@
                 <a:effectLst/>
                 <a:latin typeface="Consolas" panose="020B0609020204030204" pitchFamily="49" charset="0"/>
               </a:rPr>
-              <a:t>DOCKER_INFLUXDB_INIT_PASSWORD=influxdbKla87Sie57</a:t>
+              <a:t>DOCKER_INFLUXDB_INIT_PASSWORD=influxdbxxxSie57</a:t>
             </a:r>
             <a:endParaRPr lang="de-AT" b="0" dirty="0">
               <a:solidFill>
